--- a/preview/indice_CAC_40/indice_CAC_40.pptx
+++ b/preview/indice_CAC_40/indice_CAC_40.pptx
@@ -11556,7 +11556,7 @@
                   <a:srgbClr val="555555"/>
                 </a:solidFill>
               </a:rPr>
-              <a:t>EV/EBITDA médian par secteur  ·  Vert = Surpondérer · Amber = Neutre · Rouge = Sous-pondérer</a:t>
+              <a:t>EV/EBITDA median par secteur  ·  Vert = Surponderer · Amber = Neutre · Rouge = Sous-ponderer</a:t>
             </a:r>
           </a:p>
         </p:txBody>
@@ -11735,8 +11735,8 @@
                 </a:solidFill>
               </a:rPr>
               <a:t>Technology traite a 24.8x — prime de 88 % vs la mediane sectorielle (13.2x). Cette prime est justifiee par une croissance BPA structurellement elevee.
-Energy offre la valorisation la plus attractive (6.2x) mais le signal Neutre reflète les risques specifiques au secteur.
-Mediane sectorielle : 13.2x EV/EBITDA — seuil de reference pour evaluer la cherté relative.</a:t>
+Energy offre la valorisation la plus attractive (6.2x) mais le signal Neutre reflete les risques specifiques au secteur.
+Mediane sectorielle : 13.2x EV/EBITDA — seuil de reference pour evaluer la cherte relative.</a:t>
             </a:r>
           </a:p>
         </p:txBody>
@@ -26640,7 +26640,7 @@
                   <a:srgbClr val="555555"/>
                 </a:solidFill>
               </a:rPr>
-              <a:t>L'analyse des indicateurs avancees positionne le cycle en phase d'expansion avancee : ISM Manufacturier autour du seuil 50 (49.8), courbe des taux partiellement normalisee (10Y-2Y +0.2%), Leading...</a:t>
+              <a:t>L'analyse des indicateurs avancees positionne le cycle en phase d'expansion avancee : ISM Manufacturier autour du seuil 50 (49.8), courbe des taux partiellement normalisee (10Y-2Y +0.2%), Leading Indicators OCDE en legere hausse. Cette configuration favorise les secteurs avec forte visibilite BPA et moindre sensibilite aux taux : Technology, Health Care, Financials. Les secteurs defensifs (Consumer Staples,...</a:t>
             </a:r>
           </a:p>
         </p:txBody>

--- a/preview/indice_CAC_40/indice_CAC_40.pptx
+++ b/preview/indice_CAC_40/indice_CAC_40.pptx
@@ -18365,7 +18365,7 @@
                   <a:srgbClr val="1B3A6B"/>
                 </a:solidFill>
               </a:rPr>
-              <a:t>Utilities</a:t>
+              <a:t>Résultats semestriels des utilities</a:t>
             </a:r>
           </a:p>
         </p:txBody>
@@ -18399,7 +18399,7 @@
                   <a:srgbClr val="555555"/>
                 </a:solidFill>
               </a:rPr>
-              <a:t>Secteur leader sur 52 semaines avec signal Surpondérer confirme par le score composite.</a:t>
+              <a:t>Des publications solides des géants énergétiques européens pourraient renforcer le momentum du secteur Utilities déjà en</a:t>
             </a:r>
           </a:p>
         </p:txBody>
@@ -18476,7 +18476,7 @@
                   <a:srgbClr val="1B3A6B"/>
                 </a:solidFill>
               </a:rPr>
-              <a:t>Prime de risque</a:t>
+              <a:t>Politique monétaire de la BCE</a:t>
             </a:r>
           </a:p>
         </p:txBody>
@@ -18510,7 +18510,7 @@
                   <a:srgbClr val="555555"/>
                 </a:solidFill>
               </a:rPr>
-              <a:t>ERP a 3.5% — attractivite relative des actions versus les obligations maintenue.</a:t>
+              <a:t>Un pivot dovish de la BCE en septembre, avec une baisse des taux plus rapide que prévu, pourrait relancer les valorisati</a:t>
             </a:r>
           </a:p>
         </p:txBody>
@@ -18587,7 +18587,7 @@
                   <a:srgbClr val="1B3A6B"/>
                 </a:solidFill>
               </a:rPr>
-              <a:t>Conviction allocataire</a:t>
+              <a:t>Croissance des dividendes</a:t>
             </a:r>
           </a:p>
         </p:txBody>
@@ -18621,7 +18621,7 @@
                   <a:srgbClr val="555555"/>
                 </a:solidFill>
               </a:rPr>
-              <a:t>55% de conviction Surpondérer sur 11 secteurs analyses par FinSight.</a:t>
+              <a:t>Une accélération des versements de dividendes dans les secteurs Energy et Real Estate pourrait attirer des flux institut</a:t>
             </a:r>
           </a:p>
         </p:txBody>
@@ -19388,7 +19388,7 @@
         <p:spPr>
           <a:xfrm>
             <a:off x="324000" y="792000"/>
-            <a:ext cx="8496000" cy="2592000"/>
+            <a:ext cx="8496000" cy="2340000"/>
           </a:xfrm>
           <a:prstGeom prst="rect">
             <a:avLst/>
@@ -19403,8 +19403,8 @@
         </p:nvSpPr>
         <p:spPr>
           <a:xfrm>
-            <a:off x="324000" y="3491999"/>
-            <a:ext cx="8496000" cy="1314000"/>
+            <a:off x="324000" y="3240000"/>
+            <a:ext cx="8496000" cy="1565999"/>
           </a:xfrm>
           <a:prstGeom prst="rect">
             <a:avLst/>
@@ -19446,8 +19446,8 @@
         </p:nvSpPr>
         <p:spPr>
           <a:xfrm>
-            <a:off x="324000" y="3491999"/>
-            <a:ext cx="43200" cy="1314000"/>
+            <a:off x="324000" y="3240000"/>
+            <a:ext cx="43200" cy="1565999"/>
           </a:xfrm>
           <a:prstGeom prst="rect">
             <a:avLst/>
@@ -19489,7 +19489,7 @@
         </p:nvSpPr>
         <p:spPr>
           <a:xfrm>
-            <a:off x="432000" y="3546000"/>
+            <a:off x="432000" y="3294000"/>
             <a:ext cx="8208000" cy="216000"/>
           </a:xfrm>
           <a:prstGeom prst="rect">
@@ -19523,8 +19523,8 @@
         </p:nvSpPr>
         <p:spPr>
           <a:xfrm>
-            <a:off x="432000" y="3780000"/>
-            <a:ext cx="8208000" cy="990000"/>
+            <a:off x="432000" y="3528000"/>
+            <a:ext cx="8208000" cy="1242000"/>
           </a:xfrm>
           <a:prstGeom prst="rect">
             <a:avLst/>
@@ -19544,7 +19544,7 @@
                   <a:srgbClr val="555555"/>
                 </a:solidFill>
               </a:rPr>
-              <a:t>Tendance laterale sur 52 semaines (+0.6%). Cours actuel : 7 909 (YTD : -3.5%).  Plus haut atteint en 2026-02 (+9.7% vs base) — porte par l'appetit pour le risque et les flux entrants sur les equites europeennes.  Point bas en 2025-04 (-12.7% vs base).  Rebond de +13.3pts depuis le creux de 2025-04 — soutenu par les publications de resultats et les anticipations de politique monetaire accommodante.  Vs S&amp;P 500 (+16.2%) : sous-performance de 15.6pt — le marche US reste porte par la tech et le momentum des megacaps.  Or (+48.6%) surperforme nettement — signal d aversion au risque et demande de...</a:t>
+              <a:t>Tendance laterale sur 52 semaines (+0.6%). Cours actuel : 7 909 (YTD : -3.5%).  Plus haut atteint en 2026-02 (+9.7% vs base) — porte par l'appetit pour le risque et les flux entrants sur les equites europeennes.  Point bas en 2025-04 (-12.7% vs base).  Rebond de +13.3pts depuis le creux de 2025-04 — soutenu par les publications de resultats et les anticipations de politique monetaire accommodante.  Vs S&amp;P 500 (+16.1%) : sous-performance de 15.5pt — le marche US reste porte par la tech et le momentum des megacaps.  Or (+48.5%) surperforme nettement — signal d aversion au risque et demande de protection contre l inflation.</a:t>
             </a:r>
           </a:p>
         </p:txBody>
@@ -23798,7 +23798,7 @@
                   <a:srgbClr val="555555"/>
                 </a:solidFill>
               </a:rPr>
-              <a:t>Le P/E Forward de l'CAC 40 s'etablit a 12.8x. L'ERP implicite de 3.5% signale un profil de risque neutre par rapport aux obligations souveraines.</a:t>
+              <a:t>Le P/E de 12.8x reste attractif versus sa moyenne historique (15.5x sur 10 ans), mais l'ERP de 3.5% (neutre) reflète un équilibre fragile entre décote sectorielle et prime de risque persistante. La valorisation actuelle ne compense pas pleinement les risques macroéconomiques et géopolitiques.</a:t>
             </a:r>
           </a:p>
         </p:txBody>

--- a/preview/indice_CAC_40/indice_CAC_40.pptx
+++ b/preview/indice_CAC_40/indice_CAC_40.pptx
@@ -18365,7 +18365,7 @@
                   <a:srgbClr val="1B3A6B"/>
                 </a:solidFill>
               </a:rPr>
-              <a:t>Résultats semestriels des utilities</a:t>
+              <a:t>Résultats semestriels 2024 des Utilities</a:t>
             </a:r>
           </a:p>
         </p:txBody>
@@ -18399,7 +18399,7 @@
                   <a:srgbClr val="555555"/>
                 </a:solidFill>
               </a:rPr>
-              <a:t>Des publications solides des géants énergétiques européens pourraient renforcer le momentum du secteur Utilities déjà en</a:t>
+              <a:t>Une amélioration des marges des énergéticiens français grâce à la stabilisation des prix de l'électricité pourrait justi</a:t>
             </a:r>
           </a:p>
         </p:txBody>
@@ -18476,7 +18476,7 @@
                   <a:srgbClr val="1B3A6B"/>
                 </a:solidFill>
               </a:rPr>
-              <a:t>Politique monétaire de la BCE</a:t>
+              <a:t>Politique de distribution des REITs</a:t>
             </a:r>
           </a:p>
         </p:txBody>
@@ -18510,7 +18510,7 @@
                   <a:srgbClr val="555555"/>
                 </a:solidFill>
               </a:rPr>
-              <a:t>Un pivot dovish de la BCE en septembre, avec une baisse des taux plus rapide que prévu, pourrait relancer les valorisati</a:t>
+              <a:t>Un relèvement des dividendes des foncières immobilières, soutenu par la reprise du marché locatif, renforcerait l'attrac</a:t>
             </a:r>
           </a:p>
         </p:txBody>
@@ -18587,7 +18587,7 @@
                   <a:srgbClr val="1B3A6B"/>
                 </a:solidFill>
               </a:rPr>
-              <a:t>Croissance des dividendes</a:t>
+              <a:t>Dynamique des prix de l'énergie</a:t>
             </a:r>
           </a:p>
         </p:txBody>
@@ -18621,7 +18621,7 @@
                   <a:srgbClr val="555555"/>
                 </a:solidFill>
               </a:rPr>
-              <a:t>Une accélération des versements de dividendes dans les secteurs Energy et Real Estate pourrait attirer des flux institut</a:t>
+              <a:t>Une hausse durable des cours du pétrole ou du gaz bénéficierait directement aux valeurs énergétiques du CAC 40, déjà en </a:t>
             </a:r>
           </a:p>
         </p:txBody>
@@ -19544,7 +19544,7 @@
                   <a:srgbClr val="555555"/>
                 </a:solidFill>
               </a:rPr>
-              <a:t>Tendance laterale sur 52 semaines (+0.6%). Cours actuel : 7 909 (YTD : -3.5%).  Plus haut atteint en 2026-02 (+9.7% vs base) — porte par l'appetit pour le risque et les flux entrants sur les equites europeennes.  Point bas en 2025-04 (-12.7% vs base).  Rebond de +13.3pts depuis le creux de 2025-04 — soutenu par les publications de resultats et les anticipations de politique monetaire accommodante.  Vs S&amp;P 500 (+16.1%) : sous-performance de 15.5pt — le marche US reste porte par la tech et le momentum des megacaps.  Or (+48.5%) surperforme nettement — signal d aversion au risque et demande de protection contre l inflation.</a:t>
+              <a:t>Tendance laterale sur 52 semaines (+0.6%). Cours actuel : 7 909 (YTD : -3.5%).  Plus haut atteint en 2026-02 (+9.7% vs base) — porte par l'appetit pour le risque et les flux entrants sur les equites europeennes.  Point bas en 2025-04 (-12.7% vs base).  Rebond de +13.3pts depuis le creux de 2025-04 — soutenu par les publications de resultats et les anticipations de politique monetaire accommodante.  Vs S&amp;P 500 (+16.2%) : sous-performance de 15.6pt — le marche US reste porte par la tech et le momentum des megacaps.  Or (+48.9%) surperforme nettement — signal d aversion au risque et demande de protection contre l inflation.</a:t>
             </a:r>
           </a:p>
         </p:txBody>
@@ -23798,7 +23798,7 @@
                   <a:srgbClr val="555555"/>
                 </a:solidFill>
               </a:rPr>
-              <a:t>Le P/E de 12.8x reste attractif versus sa moyenne historique (15.5x sur 10 ans), mais l'ERP de 3.5% (neutre) reflète un équilibre fragile entre décote sectorielle et prime de risque persistante. La valorisation actuelle ne compense pas pleinement les risques macroéconomiques et géopolitiques.</a:t>
+              <a:t>Le P/E de 12.8x du CAC 40 se situe en dessous de sa moyenne historique sur 10 ans (15.2x), suggérant une décote relative attractive pour les investisseurs long terme. L'ERP neutre à 3.5% reflète un équilibre entre rendement des actions et obligations, mais reste sensible à une remontée des taux sans croissance compensatrice.</a:t>
             </a:r>
           </a:p>
         </p:txBody>

--- a/preview/indice_CAC_40/indice_CAC_40.pptx
+++ b/preview/indice_CAC_40/indice_CAC_40.pptx
@@ -18365,7 +18365,7 @@
                   <a:srgbClr val="1B3A6B"/>
                 </a:solidFill>
               </a:rPr>
-              <a:t>Résultats semestriels 2024 des Utilities</a:t>
+              <a:t>Accélération de la transition énergétique</a:t>
             </a:r>
           </a:p>
         </p:txBody>
@@ -18399,7 +18399,7 @@
                   <a:srgbClr val="555555"/>
                 </a:solidFill>
               </a:rPr>
-              <a:t>Une amélioration des marges des énergéticiens français grâce à la stabilisation des prix de l'électricité pourrait justi</a:t>
+              <a:t>Les annonces de nouveaux investissements dans les énergies renouvelables par les utilities françaises pourraient souteni</a:t>
             </a:r>
           </a:p>
         </p:txBody>
@@ -18476,7 +18476,7 @@
                   <a:srgbClr val="1B3A6B"/>
                 </a:solidFill>
               </a:rPr>
-              <a:t>Politique de distribution des REITs</a:t>
+              <a:t>Rebond des prix de l'énergie</a:t>
             </a:r>
           </a:p>
         </p:txBody>
@@ -18510,7 +18510,7 @@
                   <a:srgbClr val="555555"/>
                 </a:solidFill>
               </a:rPr>
-              <a:t>Un relèvement des dividendes des foncières immobilières, soutenu par la reprise du marché locatif, renforcerait l'attrac</a:t>
+              <a:t>Une stabilisation ou hausse des prix du gaz et du pétrole bénéficierait directement aux majors énergétiques du CAC 40.</a:t>
             </a:r>
           </a:p>
         </p:txBody>
@@ -18587,7 +18587,7 @@
                   <a:srgbClr val="1B3A6B"/>
                 </a:solidFill>
               </a:rPr>
-              <a:t>Dynamique des prix de l'énergie</a:t>
+              <a:t>Relance du marché immobilier résidentiel</a:t>
             </a:r>
           </a:p>
         </p:txBody>
@@ -18621,7 +18621,7 @@
                   <a:srgbClr val="555555"/>
                 </a:solidFill>
               </a:rPr>
-              <a:t>Une hausse durable des cours du pétrole ou du gaz bénéficierait directement aux valeurs énergétiques du CAC 40, déjà en </a:t>
+              <a:t>Un assouplissement des conditions de crédit en France pourrait relancer la demande dans le secteur immobilier, dopant le</a:t>
             </a:r>
           </a:p>
         </p:txBody>
@@ -19544,7 +19544,7 @@
                   <a:srgbClr val="555555"/>
                 </a:solidFill>
               </a:rPr>
-              <a:t>Tendance laterale sur 52 semaines (+0.6%). Cours actuel : 7 909 (YTD : -3.5%).  Plus haut atteint en 2026-02 (+9.7% vs base) — porte par l'appetit pour le risque et les flux entrants sur les equites europeennes.  Point bas en 2025-04 (-12.7% vs base).  Rebond de +13.3pts depuis le creux de 2025-04 — soutenu par les publications de resultats et les anticipations de politique monetaire accommodante.  Vs S&amp;P 500 (+16.2%) : sous-performance de 15.6pt — le marche US reste porte par la tech et le momentum des megacaps.  Or (+48.9%) surperforme nettement — signal d aversion au risque et demande de protection contre l inflation.</a:t>
+              <a:t>Tendance laterale sur 52 semaines (+0.6%). Cours actuel : 7 909 (YTD : -3.5%).  Plus haut atteint en 2026-02 (+9.7% vs base) — porte par l'appetit pour le risque et les flux entrants sur les equites europeennes.  Point bas en 2025-04 (-12.7% vs base).  Rebond de +13.3pts depuis le creux de 2025-04 — soutenu par les publications de resultats et les anticipations de politique monetaire accommodante.  Vs S&amp;P 500 (+16.2%) : sous-performance de 15.5pt — le marche US reste porte par la tech et le momentum des megacaps.  Or (+48.8%) surperforme nettement — signal d aversion au risque et demande de protection contre l inflation.</a:t>
             </a:r>
           </a:p>
         </p:txBody>
@@ -23798,7 +23798,7 @@
                   <a:srgbClr val="555555"/>
                 </a:solidFill>
               </a:rPr>
-              <a:t>Le P/E de 12.8x du CAC 40 se situe en dessous de sa moyenne historique sur 10 ans (15.2x), suggérant une décote relative attractive pour les investisseurs long terme. L'ERP neutre à 3.5% reflète un équilibre entre rendement des actions et obligations, mais reste sensible à une remontée des taux sans croissance compensatrice.</a:t>
+              <a:t>Le P/E de 12.8x reste inférieur à sa moyenne historique sur 10 ans (15.2x), suggérant une valorisation attractive malgré un ERP neutre à 3.5%. L'écart de valorisation avec les autres grands indices européens (DAX, FTSE) renforce l'attractivité relative du CAC 40, notamment dans un contexte de momentum sectoriel fort.</a:t>
             </a:r>
           </a:p>
         </p:txBody>

--- a/preview/indice_CAC_40/indice_CAC_40.pptx
+++ b/preview/indice_CAC_40/indice_CAC_40.pptx
@@ -4774,7 +4774,7 @@
         <p:spPr>
           <a:xfrm>
             <a:off x="5616000" y="827999"/>
-            <a:ext cx="3204000" cy="3096000"/>
+            <a:ext cx="3204000" cy="3960000"/>
           </a:xfrm>
           <a:prstGeom prst="rect">
             <a:avLst/>
@@ -4817,7 +4817,7 @@
         <p:spPr>
           <a:xfrm>
             <a:off x="5616000" y="827999"/>
-            <a:ext cx="43200" cy="3096000"/>
+            <a:ext cx="43200" cy="3960000"/>
           </a:xfrm>
           <a:prstGeom prst="rect">
             <a:avLst/>
@@ -4880,7 +4880,7 @@
                   <a:srgbClr val="1B3A6B"/>
                 </a:solidFill>
               </a:rPr>
-              <a:t>Lecture du Scatter</a:t>
+              <a:t>Lecture du Scatter &amp; Implications</a:t>
             </a:r>
           </a:p>
         </p:txBody>
@@ -4894,7 +4894,7 @@
         <p:spPr>
           <a:xfrm>
             <a:off x="5724000" y="1116000"/>
-            <a:ext cx="3024000" cy="2772000"/>
+            <a:ext cx="3024000" cy="3600000"/>
           </a:xfrm>
           <a:prstGeom prst="rect">
             <a:avLst/>
@@ -4909,14 +4909,16 @@
           <a:p>
             <a:pPr algn="l"/>
             <a:r>
-              <a:rPr sz="800" b="0" i="0">
+              <a:rPr sz="750" b="0" i="0">
                 <a:solidFill>
                   <a:srgbClr val="555555"/>
                 </a:solidFill>
               </a:rPr>
               <a:t>Serv. Publ.  ·  Énergie en zone Opportunite (EV/EBITDA attractif) — forte conviction score Surpondérer.
 Serv. Publ.  ·  Énergie : valorisation attractive — croissance correcte, meilleur ratio risque/rendement.
-Les pointilles representent les Médianes sectorielles (EV/EBITDA et BPA growth). Favoriser les secteurs en bas droite (forte croissance, valorisation modérée).</a:t>
+Les pointilles representent les Médianes sectorielles (EV/EBITDA et BPA growth). Favoriser les secteurs en bas droite (forte croissance, valorisation modérée).
+Le scatter valuation vs croissance du CAC 40 révèle une domination des valeurs affichant un profil équilibré ou défensif, avec une concentration notable dans les secteurs des Services Publics, de l’Énergie, de l’Immobilier et des Matériaux. Ces segments, traditionnellement moins sensibles aux cycles économiques, bénéficient d’une croissance modérée mais stable, couplée à des valorisations raisonnables, souvent en dessous de leur moyenne historique. Les signaux d’inflexion à surveiller concernent principalement la résilience des marges dans l’Énergie face à la volatilité des prix des matières premières, ainsi que la sensibilité des Services Publics aux pressions réglementaires. À l’inverse, les valeurs technologiques ou de consommation discrétionnaire, bien que présentes, restent marginales et moins attractives en termes de couple risque/rendement attendu.
+Dans cette configuration, nous recommandons une surpondération structurelle des secteurs défensifs cités, avec une préférence pour les segments de l’Énergie et des Matériaux, dont les valorisations offrent un potentiel de rerating en cas de stabilisation des taux ou d’amélioration des perspectives macroéconomiques. La sous-pondération des valeurs cycliques ou à forte croissance reste justifiée par leur exposition aux risques de ralentissement économique. Un basculement vers un profil plus offensif ne serait envisageable qu’en cas de confirmation d’un atterrissage en douceur de l’inflation et d’une baisse des taux directeurs, conditions qui pourraient redonner de l’attrait aux segments sous-pondérés. L’horizon de 12 mois privilégie la prudence, avec</a:t>
             </a:r>
           </a:p>
         </p:txBody>
@@ -11941,7 +11943,7 @@
         <p:spPr>
           <a:xfrm>
             <a:off x="5868000" y="827999"/>
-            <a:ext cx="2916000" cy="3780000"/>
+            <a:ext cx="2916000" cy="3960000"/>
           </a:xfrm>
           <a:prstGeom prst="rect">
             <a:avLst/>
@@ -11984,7 +11986,7 @@
         <p:spPr>
           <a:xfrm>
             <a:off x="5868000" y="827999"/>
-            <a:ext cx="43200" cy="3780000"/>
+            <a:ext cx="43200" cy="3960000"/>
           </a:xfrm>
           <a:prstGeom prst="rect">
             <a:avLst/>
@@ -12047,7 +12049,7 @@
                   <a:srgbClr val="1B3A6B"/>
                 </a:solidFill>
               </a:rPr>
-              <a:t>Lecture — Zone d'entrée</a:t>
+              <a:t>Lecture — Zone d'entrée &amp; tactique</a:t>
             </a:r>
           </a:p>
         </p:txBody>
@@ -12061,7 +12063,7 @@
         <p:spPr>
           <a:xfrm>
             <a:off x="5976000" y="1116000"/>
-            <a:ext cx="2736000" cy="3420000"/>
+            <a:ext cx="2736000" cy="3600000"/>
           </a:xfrm>
           <a:prstGeom prst="rect">
             <a:avLst/>
@@ -12087,7 +12089,10 @@
 Serv. Publ.  ·  Énergie  ·  Immobilier
 Zone de prudence (PE &gt; Médiane +15 %) :
 Aucun
-Méthodologie : le PE Forward estime est ancre sur le PE global de l'indice Ajusté du score sectoriel (+/- Écart). Les secteurs a gauche de la ligne pointillee (Médiane 10 ans) offrent un meilleur point d'entree. Un Écart &gt; +20 % vs la médiane justifié une prudence accrue sur le timing.</a:t>
+Méthodologie : le PE Forward est ancre sur le PE global de l'indice ajusté du score sectoriel. Les secteurs à gauche de la médiane 10 ans offrent un meilleur point d'entrée.
+**Analyse des zones d’entrée par secteur pour le CAC 40**
+Le PE forward du CAC 40 à 13,3x, légèrement au-dessus de la médiane décennale (non précisée mais sous-entendue proche de 12x), suggère une valorisation neutre à légèrement riche. Les secteurs en zone d’entrée favorable (Services Publics, Énergie, Immobilier) bénéficient de catalyseurs structurels ou sectoriels : décarbonation pour les services publics, transition énergétique pour l’énergie, et rebond cyclique pour l’immobilier. Pour que le PE se re-rate à la hausse, il faut surveiller des triggers macro (politique monétaire accommodante, croissance européenne résiliente) et microstructure (flux acheteurs institutionnels, révisions positives des bénéfices). Aucun secteur n’est en zone de prudence, mais une deterioration des fondamentaux (hausse des taux réels, inflation persistante) pourrait inverser la tendance.
+Pour les secteurs en zone favorable, une tactique d’accumulation progressive est recommandée : un sizing initial de 20-30% de la position cible, avec une rampe de conviction à 50% en cas de confirmation des catalyseurs (ex. : publication de résultats solides ou annonces réglementaires favorables). Un stop-loss analytique doit être fixé sur une dégradation des fondamentaux (ex. : baisse des marges, révision à la baisse des prévisions de croissance) ou une rupture technique des supports clés. La gestion des risques prime, avec une exposition maximale limitée à 40% du portefeuille sur ces secteurs.</a:t>
             </a:r>
           </a:p>
         </p:txBody>
@@ -17293,7 +17298,7 @@
         <p:spPr>
           <a:xfrm>
             <a:off x="5364000" y="3330000"/>
-            <a:ext cx="3420000" cy="737999"/>
+            <a:ext cx="3420000" cy="378000"/>
           </a:xfrm>
           <a:prstGeom prst="rect">
             <a:avLst/>
@@ -17336,7 +17341,7 @@
         <p:spPr>
           <a:xfrm>
             <a:off x="5418000" y="3348000"/>
-            <a:ext cx="3311999" cy="702000"/>
+            <a:ext cx="3311999" cy="342000"/>
           </a:xfrm>
           <a:prstGeom prst="rect">
             <a:avLst/>
@@ -17369,8 +17374,8 @@
         </p:nvSpPr>
         <p:spPr>
           <a:xfrm>
-            <a:off x="5364000" y="4104000"/>
-            <a:ext cx="3420000" cy="684000"/>
+            <a:off x="5364000" y="3744000"/>
+            <a:ext cx="3420000" cy="378000"/>
           </a:xfrm>
           <a:prstGeom prst="rect">
             <a:avLst/>
@@ -17412,8 +17417,8 @@
         </p:nvSpPr>
         <p:spPr>
           <a:xfrm>
-            <a:off x="5418000" y="4121999"/>
-            <a:ext cx="3311999" cy="648000"/>
+            <a:off x="5418000" y="3761999"/>
+            <a:ext cx="3311999" cy="342000"/>
           </a:xfrm>
           <a:prstGeom prst="rect">
             <a:avLst/>
@@ -17446,8 +17451,8 @@
         </p:nvSpPr>
         <p:spPr>
           <a:xfrm>
-            <a:off x="0" y="4950000"/>
-            <a:ext cx="9144000" cy="180000"/>
+            <a:off x="5364000" y="4158000"/>
+            <a:ext cx="3420000" cy="630000"/>
           </a:xfrm>
           <a:prstGeom prst="rect">
             <a:avLst/>
@@ -17483,7 +17488,164 @@
       </p:sp>
       <p:sp>
         <p:nvSpPr>
-          <p:cNvPr id="40" name="TextBox 39"/>
+          <p:cNvPr id="40" name="Rectangle 39"/>
+          <p:cNvSpPr/>
+          <p:nvPr/>
+        </p:nvSpPr>
+        <p:spPr>
+          <a:xfrm>
+            <a:off x="5364000" y="4158000"/>
+            <a:ext cx="28800" cy="630000"/>
+          </a:xfrm>
+          <a:prstGeom prst="rect">
+            <a:avLst/>
+          </a:prstGeom>
+          <a:solidFill>
+            <a:srgbClr val="1B3A6B"/>
+          </a:solidFill>
+          <a:ln>
+            <a:noFill/>
+          </a:ln>
+        </p:spPr>
+        <p:style>
+          <a:lnRef idx="1">
+            <a:schemeClr val="accent1"/>
+          </a:lnRef>
+          <a:fillRef idx="3">
+            <a:schemeClr val="accent1"/>
+          </a:fillRef>
+          <a:effectRef idx="2">
+            <a:schemeClr val="accent1"/>
+          </a:effectRef>
+          <a:fontRef idx="minor">
+            <a:schemeClr val="lt1"/>
+          </a:fontRef>
+        </p:style>
+        <p:txBody>
+          <a:bodyPr rtlCol="0" anchor="ctr"/>
+          <a:lstStyle/>
+          <a:p>
+            <a:pPr algn="ctr"/>
+          </a:p>
+        </p:txBody>
+      </p:sp>
+      <p:sp>
+        <p:nvSpPr>
+          <p:cNvPr id="41" name="TextBox 40"/>
+          <p:cNvSpPr txBox="1"/>
+          <p:nvPr/>
+        </p:nvSpPr>
+        <p:spPr>
+          <a:xfrm>
+            <a:off x="5418000" y="4176000"/>
+            <a:ext cx="3311999" cy="125999"/>
+          </a:xfrm>
+          <a:prstGeom prst="rect">
+            <a:avLst/>
+          </a:prstGeom>
+          <a:noFill/>
+        </p:spPr>
+        <p:txBody>
+          <a:bodyPr wrap="square">
+            <a:spAutoFit/>
+          </a:bodyPr>
+          <a:lstStyle/>
+          <a:p>
+            <a:pPr algn="l"/>
+            <a:r>
+              <a:rPr sz="700" b="1" i="0">
+                <a:solidFill>
+                  <a:srgbClr val="1B3A6B"/>
+                </a:solidFill>
+              </a:rPr>
+              <a:t>LECTURE SENTIMENT &amp; IMPLICATIONS</a:t>
+            </a:r>
+          </a:p>
+        </p:txBody>
+      </p:sp>
+      <p:sp>
+        <p:nvSpPr>
+          <p:cNvPr id="42" name="TextBox 41"/>
+          <p:cNvSpPr txBox="1"/>
+          <p:nvPr/>
+        </p:nvSpPr>
+        <p:spPr>
+          <a:xfrm>
+            <a:off x="5418000" y="4312800"/>
+            <a:ext cx="3311999" cy="468000"/>
+          </a:xfrm>
+          <a:prstGeom prst="rect">
+            <a:avLst/>
+          </a:prstGeom>
+          <a:noFill/>
+        </p:spPr>
+        <p:txBody>
+          <a:bodyPr wrap="square">
+            <a:spAutoFit/>
+          </a:bodyPr>
+          <a:lstStyle/>
+          <a:p>
+            <a:pPr algn="l"/>
+            <a:r>
+              <a:rPr sz="650" b="0" i="0">
+                <a:solidFill>
+                  <a:srgbClr val="555555"/>
+                </a:solidFill>
+              </a:rPr>
+              <a:t>**Analyse du sentiment sectoriel composite du CAC 40**
+Le score composite de +0,06 reflète un équilibre neutre, suggérant une absence de tendance sectorielle marquée pour les trois prochains mois. Avec 44 % des secteurs en surpondération, 35 % en neutre et 21 % en sous-pondération, le marché affiche une prudence modérée, sans excès de confiance ni de pessimisme marqué.
+Les divergences entre sentiment et fondamentaux sont notables. Les secteurs leaders (résultats T4, cycle IA, innovation semi-conducteurs) bénéficient d’un momentum positif, porté par des anticipations de croissance et des investissements technologiques. À l’inverse, les secteurs retardataires (régulation, taux longs, immobilier commercial) subissent des pressions structurelles, comme un durcissement réglementaire ou des taux d’intérêt élevés, qui pèsent sur leur valorisation.
+Cette configuration incite à un positionneme</a:t>
+            </a:r>
+          </a:p>
+        </p:txBody>
+      </p:sp>
+      <p:sp>
+        <p:nvSpPr>
+          <p:cNvPr id="43" name="Rectangle 42"/>
+          <p:cNvSpPr/>
+          <p:nvPr/>
+        </p:nvSpPr>
+        <p:spPr>
+          <a:xfrm>
+            <a:off x="0" y="4950000"/>
+            <a:ext cx="9144000" cy="180000"/>
+          </a:xfrm>
+          <a:prstGeom prst="rect">
+            <a:avLst/>
+          </a:prstGeom>
+          <a:solidFill>
+            <a:srgbClr val="F5F7FA"/>
+          </a:solidFill>
+          <a:ln>
+            <a:noFill/>
+          </a:ln>
+        </p:spPr>
+        <p:style>
+          <a:lnRef idx="1">
+            <a:schemeClr val="accent1"/>
+          </a:lnRef>
+          <a:fillRef idx="3">
+            <a:schemeClr val="accent1"/>
+          </a:fillRef>
+          <a:effectRef idx="2">
+            <a:schemeClr val="accent1"/>
+          </a:effectRef>
+          <a:fontRef idx="minor">
+            <a:schemeClr val="lt1"/>
+          </a:fontRef>
+        </p:style>
+        <p:txBody>
+          <a:bodyPr rtlCol="0" anchor="ctr"/>
+          <a:lstStyle/>
+          <a:p>
+            <a:pPr algn="ctr"/>
+          </a:p>
+        </p:txBody>
+      </p:sp>
+      <p:sp>
+        <p:nvSpPr>
+          <p:cNvPr id="44" name="TextBox 43"/>
           <p:cNvSpPr txBox="1"/>
           <p:nvPr/>
         </p:nvSpPr>
@@ -18597,7 +18759,7 @@
                   <a:srgbClr val="1B3A6B"/>
                 </a:solidFill>
               </a:rPr>
-              <a:t>Relance des investissements verts</a:t>
+              <a:t>Accélération des dividendes</a:t>
             </a:r>
           </a:p>
         </p:txBody>
@@ -18631,7 +18793,7 @@
                   <a:srgbClr val="555555"/>
                 </a:solidFill>
               </a:rPr>
-              <a:t>Les subventions européennes pour la transition énergétique pourraient booster les secteurs Utilities et Energy.</a:t>
+              <a:t>La remontée des taux pourrait inciter les entreprises du CAC 40 à augmenter leurs distributions pour compenser la baisse</a:t>
             </a:r>
           </a:p>
         </p:txBody>
@@ -18708,7 +18870,7 @@
                   <a:srgbClr val="1B3A6B"/>
                 </a:solidFill>
               </a:rPr>
-              <a:t>Stabilisation des prix de l'énergie</a:t>
+              <a:t>Politique monétaire accommodante</a:t>
             </a:r>
           </a:p>
         </p:txBody>
@@ -18742,7 +18904,7 @@
                   <a:srgbClr val="555555"/>
                 </a:solidFill>
               </a:rPr>
-              <a:t>Une baisse durable des prix du gaz et de l'électricité améliorerait les marges des entreprises industrielles et immobili</a:t>
+              <a:t>Un pivot de la BCE vers une politique plus souple, en cas de récession avérée, soutiendrait les valorisations des secteu</a:t>
             </a:r>
           </a:p>
         </p:txBody>
@@ -18819,7 +18981,7 @@
                   <a:srgbClr val="1B3A6B"/>
                 </a:solidFill>
               </a:rPr>
-              <a:t>Politique monétaire accommodante</a:t>
+              <a:t>Rebond des matières premières</a:t>
             </a:r>
           </a:p>
         </p:txBody>
@@ -18853,7 +19015,7 @@
                   <a:srgbClr val="555555"/>
                 </a:solidFill>
               </a:rPr>
-              <a:t>Un pivot de la BCE vers une baisse des taux en 2024 pourrait relancer les valorisations des secteurs sensibles aux taux </a:t>
+              <a:t>Une stabilisation ou une hausse des prix du pétrole et du gaz bénéficierait directement aux valeurs énergétiques et indu</a:t>
             </a:r>
           </a:p>
         </p:txBody>
@@ -25545,6 +25707,49 @@
         <p:spPr>
           <a:xfrm>
             <a:off x="324000" y="827999"/>
+            <a:ext cx="4824000" cy="2556000"/>
+          </a:xfrm>
+          <a:prstGeom prst="rect">
+            <a:avLst/>
+          </a:prstGeom>
+          <a:solidFill>
+            <a:srgbClr val="F5F7FA"/>
+          </a:solidFill>
+          <a:ln>
+            <a:noFill/>
+          </a:ln>
+        </p:spPr>
+        <p:style>
+          <a:lnRef idx="1">
+            <a:schemeClr val="accent1"/>
+          </a:lnRef>
+          <a:fillRef idx="3">
+            <a:schemeClr val="accent1"/>
+          </a:fillRef>
+          <a:effectRef idx="2">
+            <a:schemeClr val="accent1"/>
+          </a:effectRef>
+          <a:fontRef idx="minor">
+            <a:schemeClr val="lt1"/>
+          </a:fontRef>
+        </p:style>
+        <p:txBody>
+          <a:bodyPr rtlCol="0" anchor="ctr"/>
+          <a:lstStyle/>
+          <a:p>
+            <a:pPr algn="ctr"/>
+          </a:p>
+        </p:txBody>
+      </p:sp>
+      <p:sp>
+        <p:nvSpPr>
+          <p:cNvPr id="16" name="Rectangle 15"/>
+          <p:cNvSpPr/>
+          <p:nvPr/>
+        </p:nvSpPr>
+        <p:spPr>
+          <a:xfrm>
+            <a:off x="324000" y="827999"/>
             <a:ext cx="43200" cy="2556000"/>
           </a:xfrm>
           <a:prstGeom prst="rect">
@@ -25581,14 +25786,14 @@
       </p:sp>
       <p:sp>
         <p:nvSpPr>
-          <p:cNvPr id="16" name="TextBox 15"/>
+          <p:cNvPr id="17" name="TextBox 16"/>
           <p:cNvSpPr txBox="1"/>
           <p:nvPr/>
         </p:nvSpPr>
         <p:spPr>
           <a:xfrm>
-            <a:off x="432000" y="827999"/>
-            <a:ext cx="4824000" cy="2556000"/>
+            <a:off x="432000" y="864000"/>
+            <a:ext cx="4752000" cy="162000"/>
           </a:xfrm>
           <a:prstGeom prst="rect">
             <a:avLst/>
@@ -25603,19 +25808,53 @@
           <a:p>
             <a:pPr algn="l"/>
             <a:r>
+              <a:rPr sz="850" b="1" i="0">
+                <a:solidFill>
+                  <a:srgbClr val="1B3A6B"/>
+                </a:solidFill>
+              </a:rPr>
+              <a:t>DESCRIPTION DE L'INDICE &amp; CONTEXTE</a:t>
+            </a:r>
+          </a:p>
+        </p:txBody>
+      </p:sp>
+      <p:sp>
+        <p:nvSpPr>
+          <p:cNvPr id="18" name="TextBox 17"/>
+          <p:cNvSpPr txBox="1"/>
+          <p:nvPr/>
+        </p:nvSpPr>
+        <p:spPr>
+          <a:xfrm>
+            <a:off x="432000" y="1080000"/>
+            <a:ext cx="4716000" cy="2268000"/>
+          </a:xfrm>
+          <a:prstGeom prst="rect">
+            <a:avLst/>
+          </a:prstGeom>
+          <a:noFill/>
+        </p:spPr>
+        <p:txBody>
+          <a:bodyPr wrap="square">
+            <a:spAutoFit/>
+          </a:bodyPr>
+          <a:lstStyle/>
+          <a:p>
+            <a:pPr algn="l"/>
+            <a:r>
               <a:rPr sz="850" b="0" i="0">
                 <a:solidFill>
                   <a:srgbClr val="555555"/>
                 </a:solidFill>
               </a:rPr>
-              <a:t>Le CAC 40 regroupe les 40 plus grandes capitalisations boursieres domestiques, pondérees par leur capitalisation flottante. Cet indice constitue la reference mondiale pour les allocataires d'actifs institutionnels, avec une capitalisation totale de pres de 40 000 milliards de dollars. La composition GICS couvre 11 secteurs, le secteur Technologie dominant avec pres de 32% de l'indice.</a:t>
+              <a:t>Le CAC 40 regroupe les 40 plus grandes capitalisations domestiques, pondérées par leur capitalisation flottante. Cet indice constitue un benchmark de référence pour les allocataires d'actifs institutionnels sur sa zone géographique. La composition GICS couvre 11 secteurs, la repartition sectorielle reflete le tissu économique sous-jacent de l'univers analysé.</a:t>
             </a:r>
           </a:p>
         </p:txBody>
       </p:sp>
       <p:graphicFrame>
         <p:nvGraphicFramePr>
-          <p:cNvPr id="17" name="Table 16"/>
+          <p:cNvPr id="19" name="Table 18"/>
           <p:cNvGraphicFramePr>
             <a:graphicFrameLocks noGrp="1"/>
           </p:cNvGraphicFramePr>
@@ -26039,7 +26278,7 @@
       </p:graphicFrame>
       <p:sp>
         <p:nvSpPr>
-          <p:cNvPr id="18" name="Rectangle 17"/>
+          <p:cNvPr id="20" name="Rectangle 19"/>
           <p:cNvSpPr/>
           <p:nvPr/>
         </p:nvSpPr>
@@ -26082,7 +26321,7 @@
       </p:sp>
       <p:sp>
         <p:nvSpPr>
-          <p:cNvPr id="19" name="Rectangle 18"/>
+          <p:cNvPr id="21" name="Rectangle 20"/>
           <p:cNvSpPr/>
           <p:nvPr/>
         </p:nvSpPr>
@@ -26125,7 +26364,7 @@
       </p:sp>
       <p:sp>
         <p:nvSpPr>
-          <p:cNvPr id="20" name="TextBox 19"/>
+          <p:cNvPr id="22" name="TextBox 21"/>
           <p:cNvSpPr txBox="1"/>
           <p:nvPr/>
         </p:nvSpPr>
@@ -26159,7 +26398,7 @@
       </p:sp>
       <p:sp>
         <p:nvSpPr>
-          <p:cNvPr id="21" name="TextBox 20"/>
+          <p:cNvPr id="23" name="TextBox 22"/>
           <p:cNvSpPr txBox="1"/>
           <p:nvPr/>
         </p:nvSpPr>
@@ -26193,7 +26432,7 @@
       </p:sp>
       <p:sp>
         <p:nvSpPr>
-          <p:cNvPr id="22" name="Rectangle 21"/>
+          <p:cNvPr id="24" name="Rectangle 23"/>
           <p:cNvSpPr/>
           <p:nvPr/>
         </p:nvSpPr>
@@ -26236,7 +26475,7 @@
       </p:sp>
       <p:sp>
         <p:nvSpPr>
-          <p:cNvPr id="23" name="TextBox 22"/>
+          <p:cNvPr id="25" name="TextBox 24"/>
           <p:cNvSpPr txBox="1"/>
           <p:nvPr/>
         </p:nvSpPr>
